--- a/docs/DaoTao/Buoi07_VeMauIn.pptx
+++ b/docs/DaoTao/Buoi07_VeMauIn.pptx
@@ -606,7 +606,7 @@
           </a:p>
           <a:p>
             <a:r>
-              <a:t>3. Write Schema → cập nhật bảng trong .rpt (bản cũ thành .rpt.bak).</a:t>
+              <a:t>3. Chạy Write Schema rồi cập nhật bảng trong .rpt (bản cũ được lưu thành .rpt.bak).</a:t>
             </a:r>
           </a:p>
           <a:p>
@@ -686,17 +686,17 @@
           </a:p>
           <a:p>
             <a:r>
-              <a:t>- Hiểu Report xml: query → bảng d1 / d2, form, nhãn h_…</a:t>
-            </a:r>
-          </a:p>
-          <a:p>
-            <a:r>
-              <a:t>- Sửa / vẽ mẫu Crystal .rpt, cập nhật bằng Write Schema</a:t>
-            </a:r>
-          </a:p>
-          <a:p>
-            <a:r>
-              <a:t>- Sửa / vẽ mẫu Excel với cú pháp ?biến, !1.cột, !2.cột, #biểu thức</a:t>
+              <a:t>- Hiểu Report xml: query sinh ra bảng d1 / d2, form, nhãn h_…</a:t>
+            </a:r>
+          </a:p>
+          <a:p>
+            <a:r>
+              <a:t>- Sửa và vẽ mẫu Crystal .rpt, cập nhật cột bằng Write Schema</a:t>
+            </a:r>
+          </a:p>
+          <a:p>
+            <a:r>
+              <a:t>- Sửa và vẽ mẫu Excel với cú pháp ?biến, !1.cột, !2.cột, #biểu thức</a:t>
             </a:r>
           </a:p>
           <a:p>
@@ -721,7 +721,7 @@
           </a:p>
           <a:p>
             <a:r>
-              <a:t>3. Mẫu Crystal .rpt + Write Schema (40')</a:t>
+              <a:t>3. Mẫu Crystal .rpt và Write Schema (40')</a:t>
             </a:r>
           </a:p>
           <a:p>
@@ -806,22 +806,22 @@
           <a:lstStyle/>
           <a:p>
             <a:r>
-              <a:t>Mẫu in quyết định phiếu / báo cáo trông thế nào khi bấm In hoặc Xuất Excel. Dữ liệu do Report\&lt;Controller&gt;.xml lấy; mẫu chỉ đặt dữ liệu vào đúng chỗ.</a:t>
-            </a:r>
-          </a:p>
-          <a:p>
-            <a:r>
-              <a:t>Ba loại: Crystal Report (.rpt kèm .xsd, trong Templates\Rpt, xuất PDF) — phần lớn mẫu có sẵn; Excel (.xlsx trong Templates\Excel) — khách muốn sửa tiếp; FastReport (.frx) — hướng mới của công ty thay .rpt, Bcode có công cụ Excel → FRX.</a:t>
-            </a:r>
-          </a:p>
-          <a:p>
-            <a:r>
-              <a:t>Quy ước tên: _01, _02 nhiều mẫu; BI song ngữ; FC ngoại tệ; _a bản phụ.</a:t>
-            </a:r>
-          </a:p>
-          <a:p>
-            <a:r>
-              <a:t>FBO mẫu trên máy (bản cũ) chưa có Templates\Frx — dự án dùng .frx hay .rpt cần kiểm tra theo phiên bản.</a:t>
+              <a:t>Mẫu in quyết định phiếu hoặc báo cáo trông như thế nào khi người dùng bấm In hoặc Xuất Excel. Dữ liệu do file Report\&lt;Controller&gt;.xml lấy ra; mẫu in chỉ đặt dữ liệu đó vào đúng chỗ.</a:t>
+            </a:r>
+          </a:p>
+          <a:p>
+            <a:r>
+              <a:t>Có ba loại: Crystal Report (file .rpt kèm .xsd, nằm trong Templates\Rpt, xuất ra PDF) — phần lớn mẫu có sẵn thuộc loại này; Excel (file .xlsx trong Templates\Excel) — dùng khi khách muốn sửa tiếp trên file; FastReport (.frx) — hướng mới của công ty để thay .rpt, Bcode có công cụ chuyển Excel → FRX.</a:t>
+            </a:r>
+          </a:p>
+          <a:p>
+            <a:r>
+              <a:t>Quy ước đặt tên: _01, _02 khi có nhiều mẫu; BI là bản song ngữ; FC là bản ngoại tệ; _a là bản phụ.</a:t>
+            </a:r>
+          </a:p>
+          <a:p>
+            <a:r>
+              <a:t>Bản FBO mẫu trên máy (bản cũ) chưa có thư mục Templates\Frx — dự án dùng .frx hay .rpt thì cần kiểm tra theo phiên bản của dự án.</a:t>
             </a:r>
           </a:p>
         </p:txBody>
@@ -891,32 +891,32 @@
           <a:lstStyle/>
           <a:p>
             <a:r>
-              <a:t>Mở File Lookup, chọn menu chứng từ, thư mục Report, ví dụ IRTran.xml.</a:t>
-            </a:r>
-          </a:p>
-          <a:p>
-            <a:r>
-              <a:t>Phần query: mỗi câu SELECT trả về một bảng; theo thứ tự thành d1, d2... trong mẫu. d1 thường là đầu phiếu 1 dòng (có tiền bằng chữ qua ReadCurrency), d2 là chi tiết (thường gọi procedure rs_Print...).</a:t>
-            </a:r>
-          </a:p>
-          <a:p>
-            <a:r>
-              <a:t>@stt_rec là khoá chứng từ đang in, @@form là id mẫu người dùng chọn — dùng để rẽ nhánh (mẫu song ngữ). Query cũng có thể đổi file mẫu bằng select '...' as reportFile.</a:t>
-            </a:r>
-          </a:p>
-          <a:p>
-            <a:r>
-              <a:t>Mỗi &lt;form&gt; là một dòng trong danh sách mẫu khi bấm In: reportFile cho .rpt, templateFile cho .xlsx, commandArgument Pdf / Excel.</a:t>
-            </a:r>
-          </a:p>
-          <a:p>
-            <a:r>
-              <a:t>&lt;field name="h_..."&gt; khai nhãn song ngữ, mẫu gọi bằng tên h_...</a:t>
-            </a:r>
-          </a:p>
-          <a:p>
-            <a:r>
-              <a:t>Muốn xem dữ liệu thật: BcodeViewer Ctrl+Enter trên query (gộp entity, hỏi @stt_rec), hoặc Profiler khi bấm In.</a:t>
+              <a:t>Mở File Lookup, chọn menu chứng từ, vào thư mục Report, ví dụ file IRTran.xml.</a:t>
+            </a:r>
+          </a:p>
+          <a:p>
+            <a:r>
+              <a:t>Phần query: mỗi câu SELECT trả về một bảng; theo thứ tự, các bảng này thành d1, d2... trong mẫu in. d1 thường là đầu phiếu, chỉ 1 dòng (có số tiền bằng chữ, lấy qua ReadCurrency); d2 là phần chi tiết (thường gọi procedure rs_Print...).</a:t>
+            </a:r>
+          </a:p>
+          <a:p>
+            <a:r>
+              <a:t>@stt_rec là khoá của chứng từ đang in; @@form là id của mẫu người dùng đã chọn — dùng để rẽ nhánh xử lý (ví dụ mẫu song ngữ). Query cũng có thể đổi sang file mẫu khác bằng câu select '...' as reportFile.</a:t>
+            </a:r>
+          </a:p>
+          <a:p>
+            <a:r>
+              <a:t>Mỗi thẻ &lt;form&gt; là một dòng trong danh sách mẫu hiện ra khi bấm In: reportFile dùng cho .rpt, templateFile dùng cho .xlsx, commandArgument là Pdf hoặc Excel.</a:t>
+            </a:r>
+          </a:p>
+          <a:p>
+            <a:r>
+              <a:t>&lt;field name="h_..."&gt; khai báo nhãn song ngữ; mẫu in gọi nhãn bằng tên h_...</a:t>
+            </a:r>
+          </a:p>
+          <a:p>
+            <a:r>
+              <a:t>Muốn xem dữ liệu thật: trong BcodeViewer bấm Ctrl+Enter trên query (Viewer gộp entity và hỏi giá trị @stt_rec), hoặc bật Profiler rồi bấm In trên web.</a:t>
             </a:r>
           </a:p>
         </p:txBody>
@@ -986,42 +986,42 @@
           <a:lstStyle/>
           <a:p>
             <a:r>
-              <a:t>Quy trình sửa / vẽ mẫu .rpt:</a:t>
-            </a:r>
-          </a:p>
-          <a:p>
-            <a:r>
-              <a:t>1. Chạy query in (hoặc procedure in) trên SQL Query với một stt_rec thật → nhóm Script → Write Schema → lưu .xsd vào Templates\Rpt; xsd có các bảng d1, d2 đúng thứ tự kết quả.</a:t>
-            </a:r>
-          </a:p>
-          <a:p>
-            <a:r>
-              <a:t>2. Bcode hỏi cập nhật bảng trong .rpt → chọn file → xem cột Khác biệt cột: chữ đỏ là cột report đang dùng sẽ mất → Cập nhật (bản cũ thành .rpt.bak). Đây là bước Set Datasource Location + Verify Database của Crystal.</a:t>
-            </a:r>
-          </a:p>
-          <a:p>
-            <a:r>
-              <a:t>3. Mở .rpt bằng Crystal designer: field d1 vào đầu / cuối phiếu, d2 vào Details.</a:t>
-            </a:r>
-          </a:p>
-          <a:p>
-            <a:r>
-              <a:t>4. Nhãn dùng h_..., tham số chuẩn {?isFC}, {?roundAmount}, {?roundQuantity}.</a:t>
-            </a:r>
-          </a:p>
-          <a:p>
-            <a:r>
-              <a:t>5. Can Grow cho ô dài, khổ giấy, lề; pivot dùng Cross-Tab.</a:t>
-            </a:r>
-          </a:p>
-          <a:p>
-            <a:r>
-              <a:t>6. In thử trên web: 2 ngôn ngữ, chứng từ nhiều dòng.</a:t>
-            </a:r>
-          </a:p>
-          <a:p>
-            <a:r>
-              <a:t>Cảnh báo: Crystal âm thầm xoá ô dùng cột bị mất. Máy cần Crystal runtime 13 64-bit; designer nên cùng đời với runtime (file lưu bằng bản mới mở bằng bản cũ có thể treo).</a:t>
+              <a:t>Quy trình sửa hoặc vẽ mới một mẫu .rpt:</a:t>
+            </a:r>
+          </a:p>
+          <a:p>
+            <a:r>
+              <a:t>1. Chạy query in (hoặc procedure in) trên SQL Query với một stt_rec thật → nhóm Script → Write Schema → lưu file .xsd vào Templates\Rpt; file xsd chứa các bảng d1, d2 theo đúng thứ tự kết quả.</a:t>
+            </a:r>
+          </a:p>
+          <a:p>
+            <a:r>
+              <a:t>2. Bcode hỏi có cập nhật bảng trong file .rpt không → chọn file → xem cột Khác biệt cột: dòng chữ đỏ là cột mà report đang dùng nhưng sẽ bị mất → bấm Cập nhật (bản cũ được lưu thành .rpt.bak). Bước này tương đương Set Datasource Location + Verify Database trong Crystal.</a:t>
+            </a:r>
+          </a:p>
+          <a:p>
+            <a:r>
+              <a:t>3. Mở file .rpt bằng Crystal designer: kéo field của d1 vào phần đầu / cuối phiếu, field của d2 vào vùng Details.</a:t>
+            </a:r>
+          </a:p>
+          <a:p>
+            <a:r>
+              <a:t>4. Nhãn dùng các biến h_...; tham số chuẩn gồm {?isFC}, {?roundAmount}, {?roundQuantity}.</a:t>
+            </a:r>
+          </a:p>
+          <a:p>
+            <a:r>
+              <a:t>5. Bật Can Grow cho ô có nội dung dài, chỉnh khổ giấy và lề; bảng pivot thì dùng Cross-Tab.</a:t>
+            </a:r>
+          </a:p>
+          <a:p>
+            <a:r>
+              <a:t>6. In thử trên web: thử cả 2 ngôn ngữ và chứng từ có nhiều dòng.</a:t>
+            </a:r>
+          </a:p>
+          <a:p>
+            <a:r>
+              <a:t>Cảnh báo: Crystal âm thầm xoá các ô đang dùng cột bị mất. Máy cần cài Crystal runtime 13 64-bit; bản designer nên cùng đời với runtime (file lưu bằng bản mới mà mở bằng bản cũ có thể bị treo).</a:t>
             </a:r>
           </a:p>
         </p:txBody>
@@ -1091,12 +1091,12 @@
           <a:lstStyle/>
           <a:p>
             <a:r>
-              <a:t>Mẫu Excel là file .xlsx bình thường; ô cần dữ liệu gõ mã đặc biệt (lấy từ mẫu thật APTran.xlsx):</a:t>
-            </a:r>
-          </a:p>
-          <a:p>
-            <a:r>
-              <a:t>?ten: biến — nhãn h_ khai trong Report xml, title, Entity_Line1..4 (thông tin đơn vị), chức danh / tên người ký, reportDate.</a:t>
+              <a:t>Mẫu Excel là một file .xlsx bình thường; ô nào cần dữ liệu thì gõ mã đặc biệt vào ô đó (ví dụ lấy từ mẫu thật APTran.xlsx):</a:t>
+            </a:r>
+          </a:p>
+          <a:p>
+            <a:r>
+              <a:t>?ten: biến — gồm các nhãn h_ khai trong Report xml, title, Entity_Line1..4 (thông tin đơn vị), chức danh và tên người ký, reportDate.</a:t>
             </a:r>
           </a:p>
           <a:p>
@@ -1106,32 +1106,32 @@
           </a:p>
           <a:p>
             <a:r>
-              <a:t>#...: ghép nhiều phần bằng +; mảnh rỗng giữa hai dấu + là một dấu cách.</a:t>
-            </a:r>
-          </a:p>
-          <a:p>
-            <a:r>
-              <a:t>%c %l %r ở cuối: cờ định dạng — số tiền, căn trái, căn phải.</a:t>
-            </a:r>
-          </a:p>
-          <a:p>
-            <a:r>
-              <a:t>!1.x#điều kiện: chỉ hiện khi thoả (vd sysorder&gt;1); {b:điều kiện}: in đậm theo điều kiện.</a:t>
-            </a:r>
-          </a:p>
-          <a:p>
-            <a:r>
-              <a:t>Ô công thức Excel (=...) không được tham chiếu — lấy tổng từ query.</a:t>
-            </a:r>
-          </a:p>
-          <a:p>
-            <a:r>
-              <a:t>Ô không gắn trường thì cột không hiện dù procedure đã tính.</a:t>
-            </a:r>
-          </a:p>
-          <a:p>
-            <a:r>
-              <a:t>Quy trình: chép mẫu gần giống, đặt tên theo templateFile, sửa giữ đúng mã, nhãn mới thêm &lt;field name="h_..."&gt; vào Report xml, Page Setup (khổ, lề, fit width, lặp tiêu đề), khai &lt;form templateFile commandArgument="Excel"&gt;, in thử nhiều dòng và tiếng Anh.</a:t>
+              <a:t>#...: ghép nhiều phần thành một ô bằng dấu +; phần rỗng giữa hai dấu + là một dấu cách.</a:t>
+            </a:r>
+          </a:p>
+          <a:p>
+            <a:r>
+              <a:t>%c %l %r viết ở cuối: cờ định dạng — %c là số tiền, %l là căn trái, %r là căn phải.</a:t>
+            </a:r>
+          </a:p>
+          <a:p>
+            <a:r>
+              <a:t>!1.x#điều kiện: chỉ hiện khi thoả điều kiện (ví dụ sysorder&gt;1); {b:điều kiện}: in đậm khi thoả điều kiện.</a:t>
+            </a:r>
+          </a:p>
+          <a:p>
+            <a:r>
+              <a:t>Ô công thức Excel (=...) không tham chiếu được dữ liệu — tổng cộng phải lấy từ query.</a:t>
+            </a:r>
+          </a:p>
+          <a:p>
+            <a:r>
+              <a:t>Ô không gắn trường thì cột đó không hiện ra, dù procedure đã tính.</a:t>
+            </a:r>
+          </a:p>
+          <a:p>
+            <a:r>
+              <a:t>Quy trình: chép một mẫu gần giống, đặt tên file theo templateFile, sửa nhưng giữ đúng các mã, nhãn mới thì thêm &lt;field name="h_..."&gt; vào Report xml, chỉnh Page Setup (khổ giấy, lề, fit width, lặp dòng tiêu đề), khai báo &lt;form templateFile commandArgument="Excel"&gt;, in thử với chứng từ nhiều dòng và với tiếng Anh.</a:t>
             </a:r>
           </a:p>
         </p:txBody>
@@ -1201,22 +1201,22 @@
           <a:lstStyle/>
           <a:p>
             <a:r>
-              <a:t>.frx dùng cùng nguồn d1, d2 như xsd; nhãn / biến là Parameter; ô viết [d1.ong_ba], [title]; vùng chi tiết là DataBand gắn DataSource d2.</a:t>
-            </a:r>
-          </a:p>
-          <a:p>
-            <a:r>
-              <a:t>Công cụ Bcode: tab Excel → FRX — mở Excel mẫu in, Bcode dựng .frx, kéo thả chỉnh bố cục, xem trước PDF, lưu vào thư mục .frx (mặc định thường là Templates\Frx). Chuột phải .xlsx / .rpt trong File Lookup → Chuyển sang .frx. Bộ 28 mẫu .frx chuẩn đi kèm Bcode; mẫu trùng tên tự làm khuôn.</a:t>
-            </a:r>
-          </a:p>
-          <a:p>
-            <a:r>
-              <a:t>Quy ước: XmlDataConnection không chuỗi kết nối, cột số System.Decimal, PrintIfDatasourceEmpty False, tag số lẻ $isFC$roundAmount$roundFCAmount$. Pivot → AdvMatrixObject.</a:t>
-            </a:r>
-          </a:p>
-          <a:p>
-            <a:r>
-              <a:t>Không tự dịch: VLOOKUP, WhilePrintingRecords, Previous / Next, select case — khai tay. Cần key; luôn xem trước PDF và in thử.</a:t>
+              <a:t>File .frx dùng cùng nguồn dữ liệu d1, d2 như file xsd; nhãn và biến khai thành Parameter; ô dữ liệu viết dạng [d1.ong_ba], [title]; vùng chi tiết là một DataBand gắn với DataSource d2.</a:t>
+            </a:r>
+          </a:p>
+          <a:p>
+            <a:r>
+              <a:t>Công cụ trong Bcode: tab Excel → FRX — mở file Excel mẫu in, Bcode dựng ra file .frx, bạn kéo thả để chỉnh bố cục, xem trước dạng PDF, rồi lưu vào thư mục .frx (mặc định thường là Templates\Frx). Hoặc chuột phải file .xlsx / .rpt trong File Lookup → Chuyển sang .frx. Bcode có kèm bộ 28 mẫu .frx chuẩn; mẫu chuẩn nào trùng tên sẽ được tự dùng làm khuôn.</a:t>
+            </a:r>
+          </a:p>
+          <a:p>
+            <a:r>
+              <a:t>Quy ước: XmlDataConnection không có chuỗi kết nối, cột số dùng kiểu System.Decimal, PrintIfDatasourceEmpty đặt False, tag số lẻ là $isFC$roundAmount$roundFCAmount$. Bảng pivot chuyển thành AdvMatrixObject.</a:t>
+            </a:r>
+          </a:p>
+          <a:p>
+            <a:r>
+              <a:t>Các phần không tự chuyển được: VLOOKUP, WhilePrintingRecords, Previous / Next, select case — phải khai báo tay. Công cụ cần key bản quyền; luôn xem trước PDF và in thử.</a:t>
             </a:r>
           </a:p>
         </p:txBody>
@@ -1286,12 +1286,17 @@
           <a:lstStyle/>
           <a:p>
             <a:r>
-              <a:t>Bảng lỗi thực tế khi vẽ / chuyển mẫu in. Hai lỗi gặp nhiều nhất: sửa query mà quên cập nhật .rpt (Crystal âm thầm xoá ô dùng cột bị mất), và thêm cột trong procedure nhưng ô trên mẫu chưa gắn trường.</a:t>
-            </a:r>
-          </a:p>
-          <a:p>
-            <a:r>
-              <a:t>Khi sửa rồi mà vẫn thấy lỗi cũ: kiểm đúng file / đúng bản đang chạy trước khi sửa tiếp.</a:t>
+              <a:t>Bảng các lỗi thực tế khi vẽ hoặc chuyển mẫu in. Hai lỗi gặp nhiều nhất: sửa query mà quên cập nhật file .rpt (Crystal âm thầm xoá các ô dùng cột bị mất), và thêm cột trong procedure nhưng ô trên mẫu chưa gắn trường nên cột không hiện.</a:t>
+            </a:r>
+          </a:p>
+          <a:p>
+            <a:r>
+              <a:t>Dòng "Pivot: tên cột lệch với số": phần tiêu đề cột sắp xếp theo tên còn phần dữ liệu sắp theo mã, nên tên cột không khớp với số bên dưới — phải sắp cả hai theo cùng một khoá.</a:t>
+            </a:r>
+          </a:p>
+          <a:p>
+            <a:r>
+              <a:t>Khi đã sửa mà vẫn thấy lỗi cũ: kiểm tra lại có đúng file, đúng bản đang chạy hay không trước khi sửa tiếp.</a:t>
             </a:r>
           </a:p>
         </p:txBody>
@@ -5001,7 +5006,7 @@
                 <a:ea typeface="Segoe UI"/>
                 <a:cs typeface="Segoe UI"/>
               </a:rPr>
-              <a:t> Sau khi đổi cột của query in mẫu .rpt cần làm gì?</a:t>
+              <a:t> Sau khi đổi cột của query in, mẫu .rpt cần làm gì?</a:t>
             </a:r>
           </a:p>
           <a:p>
@@ -5355,7 +5360,7 @@
                 <a:ea typeface="Segoe UI"/>
                 <a:cs typeface="Segoe UI"/>
               </a:rPr>
-              <a:t>Hiểu Report xml: query → bảng d1 / d2, form, nhãn h_…</a:t>
+              <a:t>Hiểu Report xml: query sinh ra bảng d1 / d2, form, nhãn h_…</a:t>
             </a:r>
           </a:p>
           <a:p>
@@ -5384,7 +5389,7 @@
                 <a:ea typeface="Segoe UI"/>
                 <a:cs typeface="Segoe UI"/>
               </a:rPr>
-              <a:t>Sửa / vẽ mẫu Crystal .rpt, cập nhật bằng Write Schema</a:t>
+              <a:t>Sửa và vẽ mẫu Crystal .rpt, cập nhật cột bằng Write Schema</a:t>
             </a:r>
           </a:p>
           <a:p>
@@ -5413,7 +5418,7 @@
                 <a:ea typeface="Segoe UI"/>
                 <a:cs typeface="Segoe UI"/>
               </a:rPr>
-              <a:t>Sửa / vẽ mẫu Excel với cú pháp ?biến, !1.cột, !2.cột, #biểu thức</a:t>
+              <a:t>Sửa và vẽ mẫu Excel với cú pháp ?biến, !1.cột, !2.cột, #biểu thức</a:t>
             </a:r>
           </a:p>
           <a:p>
@@ -5731,7 +5736,7 @@
                           <a:ea typeface="Segoe UI"/>
                           <a:cs typeface="Segoe UI"/>
                         </a:rPr>
-                        <a:t>Mẫu Crystal .rpt + Write Schema</a:t>
+                        <a:t>Mẫu Crystal .rpt và Write Schema</a:t>
                       </a:r>
                     </a:p>
                   </a:txBody>
@@ -6830,7 +6835,7 @@
                           <a:ea typeface="Segoe UI"/>
                           <a:cs typeface="Segoe UI"/>
                         </a:rPr>
-                        <a:t> (vd </a:t>
+                        <a:t> (ví dụ </a:t>
                       </a:r>
                       <a:r>
                         <a:rPr sz="1400" b="0" i="0">
@@ -7046,7 +7051,7 @@
                 <a:ea typeface="Segoe UI"/>
                 <a:cs typeface="Segoe UI"/>
               </a:rPr>
-              <a:t> · </a:t>
+              <a:t> nhiều mẫu · </a:t>
             </a:r>
             <a:r>
               <a:rPr sz="1400" b="0" i="0">
@@ -7156,7 +7161,7 @@
                 <a:ea typeface="Segoe UI"/>
                 <a:cs typeface="Segoe UI"/>
               </a:rPr>
-              <a:t> — kiểm theo phiên bản.</a:t>
+              <a:t> — kiểm tra theo phiên bản.</a:t>
             </a:r>
           </a:p>
         </p:txBody>
@@ -7965,7 +7970,7 @@
                 <a:ea typeface="Segoe UI"/>
                 <a:cs typeface="Segoe UI"/>
               </a:rPr>
-              <a:t>Mỗi SELECT = 1 bảng </a:t>
+              <a:t>Mỗi SELECT là 1 bảng </a:t>
             </a:r>
             <a:r>
               <a:rPr sz="1600" b="1" i="0">
@@ -8107,7 +8112,7 @@
                 <a:ea typeface="Segoe UI"/>
                 <a:cs typeface="Segoe UI"/>
               </a:rPr>
-              <a:t>Nhãn </a:t>
+              <a:t>Nhãn song ngữ khai bằng </a:t>
             </a:r>
             <a:r>
               <a:rPr sz="1500" b="0" i="0">
@@ -8119,17 +8124,6 @@
                 <a:cs typeface="Consolas"/>
               </a:rPr>
               <a:t>h_…</a:t>
-            </a:r>
-            <a:r>
-              <a:rPr sz="1600" b="0" i="0">
-                <a:solidFill>
-                  <a:srgbClr val="263238"/>
-                </a:solidFill>
-                <a:latin typeface="Segoe UI"/>
-                <a:ea typeface="Segoe UI"/>
-                <a:cs typeface="Segoe UI"/>
-              </a:rPr>
-              <a:t> song ngữ</a:t>
             </a:r>
           </a:p>
           <a:p>
@@ -8548,7 +8542,7 @@
                 <a:ea typeface="Segoe UI"/>
                 <a:cs typeface="Segoe UI"/>
               </a:rPr>
-              <a:t>Cập nhật bảng </a:t>
+              <a:t>Cập nhật bảng trong </a:t>
             </a:r>
             <a:r>
               <a:rPr sz="1400" b="0" i="0">
@@ -8672,7 +8666,7 @@
                 <a:ea typeface="Segoe UI"/>
                 <a:cs typeface="Segoe UI"/>
               </a:rPr>
-              <a:t>Designer: d1 đầu phiếu · d2 </a:t>
+              <a:t>Designer: d1 đầu phiếu · d2 vào </a:t>
             </a:r>
             <a:r>
               <a:rPr sz="1500" b="1" i="0">
@@ -8702,6 +8696,17 @@
                 <a:cs typeface="Segoe UI"/>
               </a:rPr>
               <a:t>▪  </a:t>
+            </a:r>
+            <a:r>
+              <a:rPr sz="1500" b="0" i="0">
+                <a:solidFill>
+                  <a:srgbClr val="263238"/>
+                </a:solidFill>
+                <a:latin typeface="Segoe UI"/>
+                <a:ea typeface="Segoe UI"/>
+                <a:cs typeface="Segoe UI"/>
+              </a:rPr>
+              <a:t>Tham số </a:t>
             </a:r>
             <a:r>
               <a:rPr sz="1400" b="0" i="0">
@@ -9365,7 +9370,7 @@
                 <a:ea typeface="Segoe UI"/>
                 <a:cs typeface="Segoe UI"/>
               </a:rPr>
-              <a:t> d1 · </a:t>
+              <a:t> cột d1 · </a:t>
             </a:r>
             <a:r>
               <a:rPr sz="1400" b="0" i="0">
@@ -9387,7 +9392,7 @@
                 <a:ea typeface="Segoe UI"/>
                 <a:cs typeface="Segoe UI"/>
               </a:rPr>
-              <a:t> d2</a:t>
+              <a:t> cột d2</a:t>
             </a:r>
           </a:p>
           <a:p>
@@ -9427,7 +9432,7 @@
                 <a:ea typeface="Segoe UI"/>
                 <a:cs typeface="Segoe UI"/>
               </a:rPr>
-              <a:t> ghép ô</a:t>
+              <a:t> ghép nhiều phần vào ô</a:t>
             </a:r>
           </a:p>
           <a:p>
@@ -9489,7 +9494,7 @@
                 <a:ea typeface="Segoe UI"/>
                 <a:cs typeface="Segoe UI"/>
               </a:rPr>
-              <a:t> trái · </a:t>
+              <a:t> căn trái · </a:t>
             </a:r>
             <a:r>
               <a:rPr sz="1400" b="0" i="0">
@@ -9511,7 +9516,7 @@
                 <a:ea typeface="Segoe UI"/>
                 <a:cs typeface="Segoe UI"/>
               </a:rPr>
-              <a:t> phải</a:t>
+              <a:t> căn phải</a:t>
             </a:r>
           </a:p>
           <a:p>
@@ -9551,7 +9556,7 @@
                 <a:ea typeface="Segoe UI"/>
                 <a:cs typeface="Segoe UI"/>
               </a:rPr>
-              <a:t> hiện có điều kiện</a:t>
+              <a:t> hiện theo điều kiện</a:t>
             </a:r>
           </a:p>
           <a:p>
@@ -9591,7 +9596,7 @@
                 <a:ea typeface="Segoe UI"/>
                 <a:cs typeface="Segoe UI"/>
               </a:rPr>
-              <a:t> in đậm</a:t>
+              <a:t> in đậm theo điều kiện</a:t>
             </a:r>
           </a:p>
           <a:p>
@@ -9826,7 +9831,7 @@
                 <a:ea typeface="Segoe UI"/>
                 <a:cs typeface="Segoe UI"/>
               </a:rPr>
-              <a:t> thì cột không hiện dù procedure đã tính.</a:t>
+              <a:t> thì cột không hiện, dù procedure đã tính.</a:t>
             </a:r>
           </a:p>
         </p:txBody>
@@ -10470,7 +10475,7 @@
                 <a:ea typeface="Segoe UI"/>
                 <a:cs typeface="Segoe UI"/>
               </a:rPr>
-              <a:t>Nhãn = </a:t>
+              <a:t>Nhãn là </a:t>
             </a:r>
             <a:r>
               <a:rPr sz="1500" b="1" i="0">
@@ -10696,7 +10701,7 @@
                 <a:ea typeface="Segoe UI"/>
                 <a:cs typeface="Segoe UI"/>
               </a:rPr>
-              <a:t>VLOOKUP, Previous… phải khai tay</a:t>
+              <a:t>VLOOKUP, Previous… phải khai báo tay</a:t>
             </a:r>
           </a:p>
         </p:txBody>
@@ -10836,7 +10841,7 @@
                 <a:ea typeface="Segoe UI"/>
                 <a:cs typeface="Segoe UI"/>
               </a:rPr>
-              <a:t> Convert xong luôn </a:t>
+              <a:t> Chuyển xong luôn </a:t>
             </a:r>
             <a:r>
               <a:rPr sz="1400" b="1" i="0">
@@ -10858,7 +10863,7 @@
                 <a:ea typeface="Segoe UI"/>
                 <a:cs typeface="Segoe UI"/>
               </a:rPr>
-              <a:t> — căn tay phần lệch.</a:t>
+              <a:t> — căn chỉnh tay phần bị lệch.</a:t>
             </a:r>
           </a:p>
         </p:txBody>
@@ -11199,7 +11204,7 @@
                           <a:ea typeface="Segoe UI"/>
                           <a:cs typeface="Segoe UI"/>
                         </a:rPr>
-                        <a:t>Chưa cập nhật .rpt → Write Schema; lấy lại </a:t>
+                        <a:t>Chưa cập nhật .rpt → chạy Write Schema; lấy lại </a:t>
                       </a:r>
                       <a:r>
                         <a:rPr sz="1400" b="0" i="0">
@@ -11236,7 +11241,7 @@
                           <a:ea typeface="Segoe UI"/>
                           <a:cs typeface="Segoe UI"/>
                         </a:rPr>
-                        <a:t>Thêm cột procedure mà phiếu không hiện</a:t>
+                        <a:t>Thêm cột trong procedure mà phiếu không hiện</a:t>
                       </a:r>
                     </a:p>
                   </a:txBody>
@@ -11282,7 +11287,7 @@
                           <a:ea typeface="Segoe UI"/>
                           <a:cs typeface="Segoe UI"/>
                         </a:rPr>
-                        <a:t> / kéo field</a:t>
+                        <a:t> hoặc kéo field</a:t>
                       </a:r>
                     </a:p>
                   </a:txBody>
@@ -11308,7 +11313,7 @@
                           <a:ea typeface="Segoe UI"/>
                           <a:cs typeface="Segoe UI"/>
                         </a:rPr>
-                        <a:t>Số thành chữ, kiểu cột sai</a:t>
+                        <a:t>Số hiện thành chữ, kiểu cột sai</a:t>
                       </a:r>
                     </a:p>
                   </a:txBody>
@@ -11332,7 +11337,7 @@
                           <a:ea typeface="Segoe UI"/>
                           <a:cs typeface="Segoe UI"/>
                         </a:rPr>
-                        <a:t>Không có </a:t>
+                        <a:t>Thiếu </a:t>
                       </a:r>
                       <a:r>
                         <a:rPr sz="1400" b="0" i="0">
@@ -11354,7 +11359,7 @@
                           <a:ea typeface="Segoe UI"/>
                           <a:cs typeface="Segoe UI"/>
                         </a:rPr>
-                        <a:t> khi vẽ / chuyển → Write Schema trước</a:t>
+                        <a:t> khi vẽ / chuyển → chạy Write Schema trước</a:t>
                       </a:r>
                     </a:p>
                   </a:txBody>
@@ -11380,7 +11385,7 @@
                           <a:ea typeface="Segoe UI"/>
                           <a:cs typeface="Segoe UI"/>
                         </a:rPr>
-                        <a:t>Chữ tràn, kẻ cắt chữ, mã bị ngắt dòng</a:t>
+                        <a:t>Chữ tràn, đường kẻ cắt chữ, mã bị ngắt dòng</a:t>
                       </a:r>
                     </a:p>
                   </a:txBody>
@@ -11404,7 +11409,7 @@
                           <a:ea typeface="Segoe UI"/>
                           <a:cs typeface="Segoe UI"/>
                         </a:rPr>
-                        <a:t>Can Grow (rpt) / AutoShrink (frx), nới ô</a:t>
+                        <a:t>Can Grow (rpt) / AutoShrink (frx), nới rộng ô</a:t>
                       </a:r>
                     </a:p>
                   </a:txBody>
@@ -11454,7 +11459,7 @@
                           <a:ea typeface="Segoe UI"/>
                           <a:cs typeface="Segoe UI"/>
                         </a:rPr>
-                        <a:t>Rộng hơn khổ giấy → giảm cột, khổ ngang, Fit to width</a:t>
+                        <a:t>Rộng hơn khổ giấy → bớt cột, in khổ ngang, Fit to width</a:t>
                       </a:r>
                     </a:p>
                   </a:txBody>
@@ -11480,7 +11485,7 @@
                           <a:ea typeface="Segoe UI"/>
                           <a:cs typeface="Segoe UI"/>
                         </a:rPr>
-                        <a:t>Pivot: tên cột lệch số</a:t>
+                        <a:t>Pivot: tên cột lệch với số</a:t>
                       </a:r>
                     </a:p>
                   </a:txBody>
@@ -11504,7 +11509,7 @@
                           <a:ea typeface="Segoe UI"/>
                           <a:cs typeface="Segoe UI"/>
                         </a:rPr>
-                        <a:t>Header và dữ liệu sắp khác khoá → cùng khoá</a:t>
+                        <a:t>Header và dữ liệu sắp theo khoá khác nhau → dùng cùng khoá</a:t>
                       </a:r>
                     </a:p>
                   </a:txBody>
@@ -11554,7 +11559,7 @@
                           <a:ea typeface="Segoe UI"/>
                           <a:cs typeface="Segoe UI"/>
                         </a:rPr>
-                        <a:t>Lưu bằng runtime mới hơn designer → dùng cùng đời</a:t>
+                        <a:t>File lưu bằng runtime mới hơn designer → dùng cùng đời</a:t>
                       </a:r>
                     </a:p>
                   </a:txBody>
@@ -11914,7 +11919,7 @@
                 <a:ea typeface="Segoe UI"/>
                 <a:cs typeface="Segoe UI"/>
               </a:rPr>
-              <a:t> Chép mẫu Excel có sẵn, thêm nhãn + cột, khai form mới, in thử.</a:t>
+              <a:t> Chép một mẫu Excel có sẵn, thêm nhãn và cột, khai form mới rồi in thử.</a:t>
             </a:r>
           </a:p>
           <a:p>
@@ -11954,7 +11959,7 @@
                 <a:ea typeface="Segoe UI"/>
                 <a:cs typeface="Segoe UI"/>
               </a:rPr>
-              <a:t> Write Schema cho query in, xem d1 / d2; Excel → FRX xem trước PDF.</a:t>
+              <a:t> Chạy Write Schema cho query in và xem d1, d2; chuyển mẫu bằng Excel → FRX rồi xem trước PDF.</a:t>
             </a:r>
           </a:p>
         </p:txBody>
